--- a/deck/from-chaos-to-symphony.pptx
+++ b/deck/from-chaos-to-symphony.pptx
@@ -13238,13 +13238,13 @@
           <a:p>
             <a:r>
               <a:rPr lang="en-GB" dirty="0"/>
-              <a:t>Baltic Freight Group — a freight forwarder with twenty shipments in trouble</a:t>
-            </a:r>
-          </a:p>
-          <a:p>
-            <a:r>
-              <a:rPr lang="en-GB" dirty="0"/>
-              <a:t>Every pattern works the same exception data</a:t>
+              <a:t>Baltic Travel Agency — a Riga travel agency with twenty bookings, thirteen in trouble</a:t>
+            </a:r>
+          </a:p>
+          <a:p>
+            <a:r>
+              <a:rPr lang="en-GB" dirty="0"/>
+              <a:t>Every pattern works the same book of trips</a:t>
             </a:r>
           </a:p>
           <a:p>
